--- a/courseware/DSA_CH06_Tree.pptx
+++ b/courseware/DSA_CH06_Tree.pptx
@@ -10611,7 +10611,7 @@
                 <a:latin typeface="Segoe UI"/>
                 <a:ea typeface="微软雅黑"/>
               </a:rPr>
-              <a:t>345 道</a:t>
+              <a:t>344 道</a:t>
             </a:r>
             <a:r>
               <a:rPr sz="1850" b="0" i="0">

--- a/courseware/DSA_CH06_Tree.pptx
+++ b/courseware/DSA_CH06_Tree.pptx
@@ -6061,7 +6061,7 @@
         </p:nvSpPr>
         <p:spPr>
           <a:xfrm>
-            <a:off x="566928" y="5200269"/>
+            <a:off x="566928" y="5200268"/>
             <a:ext cx="11057839" cy="329184"/>
           </a:xfrm>
           <a:prstGeom prst="rect">

--- a/courseware/DSA_CH06_Tree.pptx
+++ b/courseware/DSA_CH06_Tree.pptx
@@ -6061,7 +6061,7 @@
         </p:nvSpPr>
         <p:spPr>
           <a:xfrm>
-            <a:off x="566928" y="5200268"/>
+            <a:off x="566928" y="5200269"/>
             <a:ext cx="11057839" cy="329184"/>
           </a:xfrm>
           <a:prstGeom prst="rect">
